--- a/word-drafts/figures/Observability-Fig3-BoundItem.pptx
+++ b/word-drafts/figures/Observability-Fig3-BoundItem.pptx
@@ -3667,6 +3667,39 @@
           </a:fontRef>
         </p:style>
       </p:cxnSp>
+      <p:sp>
+        <p:nvSpPr>
+          <p:cNvPr id="9" name="TextBox 8"/>
+          <p:cNvSpPr txBox="1"/>
+          <p:nvPr/>
+        </p:nvSpPr>
+        <p:spPr>
+          <a:xfrm>
+            <a:off x="2667000" y="2314575"/>
+            <a:ext cx="238125" cy="123825"/>
+          </a:xfrm>
+          <a:prstGeom prst="rect">
+            <a:avLst/>
+          </a:prstGeom>
+          <a:noFill/>
+        </p:spPr>
+        <p:txBody>
+          <a:bodyPr wrap="none" lIns="0" rIns="0" tIns="0" bIns="0">
+            <a:spAutoFit/>
+          </a:bodyPr>
+          <a:lstStyle/>
+          <a:p>
+            <a:r>
+              <a:rPr sz="800">
+                <a:solidFill>
+                  <a:srgbClr val="444444"/>
+                </a:solidFill>
+              </a:rPr>
+              <a:t>Kind</a:t>
+            </a:r>
+          </a:p>
+        </p:txBody>
+      </p:sp>
     </p:spTree>
   </p:cSld>
   <p:clrMapOvr>

--- a/word-drafts/figures/Observability-Fig3-BoundItem.pptx
+++ b/word-drafts/figures/Observability-Fig3-BoundItem.pptx
@@ -3676,7 +3676,7 @@
         <p:spPr>
           <a:xfrm>
             <a:off x="2667000" y="2314575"/>
-            <a:ext cx="238125" cy="123825"/>
+            <a:ext cx="285750" cy="123825"/>
           </a:xfrm>
           <a:prstGeom prst="rect">
             <a:avLst/>
